--- a/Courses/Software-Sciences/IT-Module-3-Web-Design/02-Website-Planning/02-Website-Planning.pptx
+++ b/Courses/Software-Sciences/IT-Module-3-Web-Design/02-Website-Planning/02-Website-Planning.pptx
@@ -336,7 +336,7 @@
           <a:p>
             <a:fld id="{4E087215-0C8F-4762-A664-737A353EC9A4}" type="datetimeFigureOut">
               <a:rPr lang="bg-BG" smtClean="0"/>
-              <a:t>20.11.25 г.</a:t>
+              <a:t>4.09.26 г.</a:t>
             </a:fld>
             <a:endParaRPr lang="bg-BG"/>
           </a:p>
@@ -532,7 +532,7 @@
           <a:p>
             <a:fld id="{72D84649-876A-46C9-8472-14CB09C070D8}" type="datetimeFigureOut">
               <a:rPr lang="en-US" smtClean="0"/>
-              <a:t>11/20/25</a:t>
+              <a:t>9/4/26</a:t>
             </a:fld>
             <a:endParaRPr lang="en-US"/>
           </a:p>
@@ -10882,8 +10882,8 @@
         </p:blipFill>
         <p:spPr>
           <a:xfrm>
-            <a:off x="611007" y="3056137"/>
-            <a:ext cx="1819960" cy="849053"/>
+            <a:off x="611007" y="3073413"/>
+            <a:ext cx="1819960" cy="814500"/>
           </a:xfrm>
           <a:prstGeom prst="rect">
             <a:avLst/>
@@ -18748,11 +18748,11 @@
   <p:clrMapOvr>
     <a:masterClrMapping/>
   </p:clrMapOvr>
-  <mc:AlternateContent xmlns:mc="http://schemas.openxmlformats.org/markup-compatibility/2006">
-    <mc:Choice xmlns:p14="http://schemas.microsoft.com/office/powerpoint/2010/main" Requires="p14">
+  <mc:AlternateContent xmlns:mc="http://schemas.openxmlformats.org/markup-compatibility/2006" xmlns:p14="http://schemas.microsoft.com/office/powerpoint/2010/main">
+    <mc:Choice Requires="p14">
       <p:transition spd="slow" p14:dur="2000" advClick="0" advTm="5000"/>
     </mc:Choice>
-    <mc:Fallback>
+    <mc:Fallback xmlns="">
       <p:transition spd="slow" advClick="0" advTm="5000"/>
     </mc:Fallback>
   </mc:AlternateContent>
